--- a/corso/export/pptx/Patente nautica Vela-Motore entro le 12 miglia e senza limiti dalla costa - Fabrizio Fiorucci.pptx
+++ b/corso/export/pptx/Patente nautica Vela-Motore entro le 12 miglia e senza limiti dalla costa - Fabrizio Fiorucci.pptx
@@ -670,7 +670,7 @@
           <a:lstStyle/>
           <a:p>
             <a:r>
-              <a:t>[30 secondi · minuto 5:35] Lezione 3: ormeggi, cartografia e primi calcoli. Ormeggi e attracchi; latitudine e longitudine, miglio e nodo, i tipi di carte e le pubblicazioni nautiche, la proiezione di Mercatore e la lossodromia. Poi il primo carteggio: rosa dei venti, rotte, bussola, navigazione stimata e i calcoli di miglia, velocità e carburante, con gli esercizi d'esame che usano proprio questi calcoli.</a:t>
+              <a:t>[30 secondi · minuto 5:35] Lezione 3: ormeggi, ancoraggi, carte e segnali. Ormeggi e attracchi, l'elica in manovra, le ancore, il calumo e i tipi di ancoraggio. Poi la cartografia: latitudine e longitudine, miglio e nodo, carte e pubblicazioni, Mercatore e lossodromia; e il segnalamento marittimo: fari, sistema AISM-IALA e navigazione fluviale. Ultimi 45 minuti: raccolta di quiz ufficiali.</a:t>
             </a:r>
           </a:p>
         </p:txBody>
@@ -740,7 +740,7 @@
           <a:lstStyle/>
           <a:p>
             <a:r>
-              <a:t>[30 secondi · minuto 6:05] Lezione 4: ancoraggio, prora e rotta, 4 domande su 20 insieme agli altri temi di manovra e condotta. Cime e sistemi d'ormeggio, gavitelli, ancore, dar fondo e salpare, grippia e verifica della tenuta. Nel carteggio: rotta e prora vera, scarroccio e deriva, declinazione e deviazione. Abbiamo aggiunto la condotta sottocosta dell'Allegato A: limiti di velocità, zone di balneazione, corridoi di lancio e distanze dai subacquei.</a:t>
+              <a:t>[30 secondi · minuto 6:05] Lezione 4: carteggio e navigazione, seguendo la scaletta della scuola dalla rosa dei venti alla tabella delle deviazioni. Rosa, quadranti, bussola, coordinate; navigazione stimata, misura delle miglia, il triangolo miglia-velocità-tempo con i minuti e il carburante con la riserva. Poi rotta e prora vera, scarroccio, deriva, moto proprio ed effettivo, declinazione, deviazione e tabella. Abbiamo aggiunto la condotta sottocosta dell'Allegato A. Ultimi 45 minuti: raccolta di quiz ufficiali.</a:t>
             </a:r>
           </a:p>
         </p:txBody>
@@ -810,7 +810,7 @@
           <a:lstStyle/>
           <a:p>
             <a:r>
-              <a:t>[30 secondi · minuto 6:35] Lezione 5: punto nave e fanali. Navigazione costiera, rilevamenti, rilevamento polare, GPS: 4 domande su 20 dalla navigazione. Poi la prevenzione degli abbordi, altre 2 domande: tutti i fanali e le luci speciali, i segnali diurni che abbiamo aggiunto (pallone, cilindro, rombo, cono), la gerarchia delle precedenze a motore e a vela e il rischio di collisione.</a:t>
+              <a:t>[30 secondi · minuto 6:35] Lezione 5: punto nave e fanali. La fine della scaletta di carteggio della scuola: navigazione costiera, luoghi di posizione, punto nave con due punti cospicui o con uno solo, rilevamento polare, tutti i rilevamenti con le tecniche del punto nave e il GPS: 4 domande su 20 dalla navigazione. Poi la prevenzione degli abbordi, altre 2 domande: fanali, luci speciali, i segnali diurni che abbiamo aggiunto, la gerarchia delle precedenze e il rischio di collisione.</a:t>
             </a:r>
           </a:p>
         </p:txBody>
@@ -2350,7 +2350,7 @@
           <a:lstStyle/>
           <a:p>
             <a:r>
-              <a:t>[30 secondi · minuto 3:30] Ecco le quindici lezioni. Le prime nove, 18 ore, portano alla patente entro 12 miglia: scafo, motori, ormeggi e carte, ancoraggio, punto nave e fanali, segnalamento, sicurezza ed emergenze, meteo e normativa, poi la lezione 8 tutta dedicata alla prova di carteggio entro 12 miglia, e infine la lezione 9, tutta di vela. Le ultime sei, 12 ore, sono il carteggio oltre le 12 miglia: navigazione costiera, carburante, scarroccio, due lezioni sulle correnti e la carta 42/D. Il carteggio entro 12 miglia si costruisce nelle lezioni 3, 4 e 5 e si prova nella 8 sugli esercizi ufficiali. Le etichette dicono chi segue ogni lezione: la vela è concentrata nella 9, così chi fa solo motore la salta senza perdere nulla. Quattro percorsi: entro 12 miglia motore, lezioni 1-8, 16 ore; entro 12 miglia vela e motore, 1-9, 18 ore; senza limiti motore, tutte tranne la 9, 28 ore; senza limiti vela e motore, tutte e 15, 30 ore.</a:t>
+              <a:t>[30 secondi · minuto 3:30] Ecco le quindici lezioni. Le prime nove, 18 ore, portano alla patente entro 12 miglia: scafo, motori, ormeggi, ancoraggi, carte e segnali, il carteggio con prora e rotta e la condotta sottocosta, punto nave e fanali, segnali sonori, sicurezza ed emergenze, meteo e normativa, poi la lezione 8 tutta dedicata alla prova di carteggio entro 12 miglia, e infine la lezione 9, tutta di vela. Le ultime sei, 12 ore, sono il carteggio oltre le 12 miglia: navigazione costiera, carburante, scarroccio, due lezioni sulle correnti e la carta 42/D. Il carteggio entro 12 miglia si costruisce nelle lezioni 3, 4 e 5 e si prova nella 8 sugli esercizi ufficiali. Le etichette dicono chi segue ogni lezione: la vela è concentrata nella 9, così chi fa solo motore la salta senza perdere nulla. Quattro percorsi: entro 12 miglia motore, lezioni 1-8, 16 ore; entro 12 miglia vela e motore, 1-9, 18 ore; senza limiti motore, tutte tranne la 9, 28 ore; senza limiti vela e motore, tutte e 15, 30 ore.</a:t>
             </a:r>
           </a:p>
         </p:txBody>

--- a/corso/export/pptx/Patente nautica Vela-Motore entro le 12 miglia e senza limiti dalla costa - Fabrizio Fiorucci.pptx
+++ b/corso/export/pptx/Patente nautica Vela-Motore entro le 12 miglia e senza limiti dalla costa - Fabrizio Fiorucci.pptx
@@ -810,7 +810,7 @@
           <a:lstStyle/>
           <a:p>
             <a:r>
-              <a:t>[30 secondi · minuto 6:35] Lezione 5: punto nave e fanali. La fine della scaletta di carteggio della scuola: navigazione costiera, luoghi di posizione, punto nave con due punti cospicui o con uno solo, rilevamento polare, tutti i rilevamenti con le tecniche del punto nave e il GPS: 4 domande su 20 dalla navigazione. Poi la prevenzione degli abbordi, altre 2 domande: fanali, luci speciali, i segnali diurni che abbiamo aggiunto, la gerarchia delle precedenze e il rischio di collisione.</a:t>
+              <a:t>[30 secondi · minuto 6:35] Lezione 5: COLREG e prevenzione degli abbordi. La fine della scaletta di carteggio della scuola: navigazione costiera, luoghi di posizione, punto nave con due punti cospicui o con uno solo, rilevamento polare, tutti i rilevamenti con le tecniche del punto nave e il GPS: 4 domande su 20 dalla navigazione. Poi la prevenzione degli abbordi, altre 2 domande: fanali, luci speciali, i segnali diurni che abbiamo aggiunto, la gerarchia delle precedenze e il rischio di collisione.</a:t>
             </a:r>
           </a:p>
         </p:txBody>
@@ -880,7 +880,7 @@
           <a:lstStyle/>
           <a:p>
             <a:r>
-              <a:t>[30 secondi · minuto 7:05] Lezione 6: segnalamento, segnali sonori e sicurezza. Simboli delle carte, elenco dei fari, caratteristiche e portate, il sistema IALA con laterali, cardinali, pericolo isolato, acque sicure e segnali speciali. Poi i segnali sonori e il comportamento all'ingresso e all'uscita dei porti. Infine la sicurezza, 3 domande su 20: le dotazioni obbligatorie per distanza dalla costa, aggiornate al DM 133 del 2024, l'incendio e, subito dopo, le emergenze: falla, incaglio, collisione, uomo a mare, abbandono, radio VHF, soccorso e cattivo tempo, con il CIRM e le regole su alcol e sostanze. È la lezione più densa: 42 slide.</a:t>
+              <a:t>[30 secondi · minuto 7:05] Lezione 6: la sicurezza e i suoi elementi nella navigazione. I segnali sonori di manovra e in nebbia e le regole nei porti; le dotazioni di sicurezza secondo il DM 133/2024, i mezzi di soccorso e l'incendio; poi le emergenze: falla, incaglio, collisione, uomo a mare, abbandono, la radio VHF e il soccorso, il cattivo tempo, il CIRM, alcol e sostanze. Fari e segnalamento sono passati nella lezione 3.</a:t>
             </a:r>
           </a:p>
         </p:txBody>
@@ -1020,7 +1020,7 @@
           <a:lstStyle/>
           <a:p>
             <a:r>
-              <a:t>[30 secondi · minuto 8:00] Lezione 8, per tutti: è l'ultima lezione della patente entro 12 miglia a motore. Tutta la lezione è dedicata alla prova di carteggio entro 12 miglia: un esercizio dell'elenco ufficiale con 5 quesiti in 20 minuti. Si riprendono gli strumenti e si affronta un quesito alla volta, coordinate, distanza, ora o velocità e carburante, con il metodo e gli errori tipici; poi quattro esercizi ufficiali risolti sulla carta 5/D e una prova simulata a cronometro. Le emergenze sono passate nella lezione 6.</a:t>
+              <a:t>[30 secondi · minuto 8:00] Lezione 8, quiz ed esercizi di carteggio di navigazione entro le 12 miglia, per tutti: è l'ultima lezione della patente entro 12 miglia a motore. Tutta la lezione è dedicata alla prova di carteggio entro 12 miglia: un esercizio dell'elenco ufficiale con 5 quesiti in 20 minuti. Si riprendono gli strumenti e si affronta un quesito alla volta, coordinate, distanza, ora o velocità e carburante, con il metodo e gli errori tipici; poi quattro esercizi ufficiali risolti sulla carta 5/D e una prova simulata a cronometro. Le emergenze sono passate nella lezione 6.</a:t>
             </a:r>
           </a:p>
         </p:txBody>
@@ -2350,7 +2350,7 @@
           <a:lstStyle/>
           <a:p>
             <a:r>
-              <a:t>[30 secondi · minuto 3:30] Ecco le quindici lezioni. Le prime nove, 18 ore, portano alla patente entro 12 miglia: scafo, motori, ormeggi, ancoraggi, carte e segnali, il carteggio con prora e rotta e la condotta sottocosta, punto nave e fanali, segnali sonori, sicurezza ed emergenze, meteo e normativa, poi la lezione 8 tutta dedicata alla prova di carteggio entro 12 miglia, e infine la lezione 9, tutta di vela. Le ultime sei, 12 ore, sono il carteggio oltre le 12 miglia: navigazione costiera, carburante, scarroccio, due lezioni sulle correnti e la carta 42/D. Il carteggio entro 12 miglia si costruisce nelle lezioni 3, 4 e 5 e si prova nella 8 sugli esercizi ufficiali. Le etichette dicono chi segue ogni lezione: la vela è concentrata nella 9, così chi fa solo motore la salta senza perdere nulla. Quattro percorsi: entro 12 miglia motore, lezioni 1-8, 16 ore; entro 12 miglia vela e motore, 1-9, 18 ore; senza limiti motore, tutte tranne la 9, 28 ore; senza limiti vela e motore, tutte e 15, 30 ore.</a:t>
+              <a:t>[30 secondi · minuto 3:30] Ecco le quindici lezioni. Le prime nove, 18 ore, portano alla patente entro 12 miglia: scafo, motori, ormeggi, ancoraggi, carte e segnali, il carteggio con prora e rotta e la condotta sottocosta, COLREG e prevenzione degli abbordi, la sicurezza nella navigazione, meteo e normativa, poi la lezione 8 tutta dedicata alla prova di carteggio entro 12 miglia, e infine la lezione 9, tutta di vela. Le ultime sei, 12 ore, sono il carteggio oltre le 12 miglia: navigazione costiera, carburante, scarroccio, due lezioni sulle correnti e la carta 42/D. Il carteggio entro 12 miglia si costruisce nelle lezioni 3, 4 e 5 e si prova nella 8 sugli esercizi ufficiali. Le etichette dicono chi segue ogni lezione: la vela è concentrata nella 9, così chi fa solo motore la salta senza perdere nulla. Quattro percorsi: entro 12 miglia motore, lezioni 1-8, 16 ore; entro 12 miglia vela e motore, 1-9, 18 ore; senza limiti motore, tutte tranne la 9, 28 ore; senza limiti vela e motore, tutte e 15, 30 ore.</a:t>
             </a:r>
           </a:p>
         </p:txBody>

--- a/corso/export/pptx/Patente nautica Vela-Motore entro le 12 miglia e senza limiti dalla costa - Fabrizio Fiorucci.pptx
+++ b/corso/export/pptx/Patente nautica Vela-Motore entro le 12 miglia e senza limiti dalla costa - Fabrizio Fiorucci.pptx
@@ -740,7 +740,7 @@
           <a:lstStyle/>
           <a:p>
             <a:r>
-              <a:t>[30 secondi · minuto 6:05] Lezione 4: carteggio e navigazione, seguendo la scaletta della scuola dalla rosa dei venti alla tabella delle deviazioni. Rosa, quadranti, bussola, coordinate; navigazione stimata, misura delle miglia, il triangolo miglia-velocità-tempo con i minuti e il carburante con la riserva. Poi rotta e prora vera, scarroccio, deriva, moto proprio ed effettivo, declinazione, deviazione e tabella. Abbiamo aggiunto la condotta sottocosta dell'Allegato A. Ultimi 45 minuti: raccolta di quiz ufficiali.</a:t>
+              <a:t>[30 secondi · minuto 6:05] Lezione 4: carteggio e navigazione, seguendo tutta la scaletta della scuola, dalla rosa dei venti al GPS. Rosa, quadranti, bussola, coordinate; navigazione stimata, misura delle miglia, il triangolo miglia-velocità-tempo con i minuti e il carburante con la riserva. Poi rotta e prora vera, scarroccio, deriva, moto proprio ed effettivo, declinazione, deviazione e tabella; infine navigazione costiera, luoghi di posizione, punto nave, rilevamenti e GPS: 4 domande su 20 dalla navigazione. Abbiamo aggiunto la condotta sottocosta dell'Allegato A. Ultimi 45 minuti: raccolta di quiz ufficiali.</a:t>
             </a:r>
           </a:p>
         </p:txBody>
@@ -810,7 +810,7 @@
           <a:lstStyle/>
           <a:p>
             <a:r>
-              <a:t>[30 secondi · minuto 6:35] Lezione 5: COLREG e prevenzione degli abbordi. La fine della scaletta di carteggio della scuola: navigazione costiera, luoghi di posizione, punto nave con due punti cospicui o con uno solo, rilevamento polare, tutti i rilevamenti con le tecniche del punto nave e il GPS: 4 domande su 20 dalla navigazione. Poi la prevenzione degli abbordi, altre 2 domande: fanali, luci speciali, i segnali diurni che abbiamo aggiunto, la gerarchia delle precedenze e il rischio di collisione.</a:t>
+              <a:t>[30 secondi · minuto 6:35] Lezione 5: COLREG e prevenzione degli abbordi, 2 domande su 20: fanali, luci speciali, i segnali diurni che abbiamo aggiunto, la gerarchia delle precedenze, il rischio di collisione e le regole di rotta. Il carteggio del punto nave e dei rilevamenti è nella lezione 4.</a:t>
             </a:r>
           </a:p>
         </p:txBody>

--- a/corso/export/pptx/Patente nautica Vela-Motore entro le 12 miglia e senza limiti dalla costa - Fabrizio Fiorucci.pptx
+++ b/corso/export/pptx/Patente nautica Vela-Motore entro le 12 miglia e senza limiti dalla costa - Fabrizio Fiorucci.pptx
@@ -810,7 +810,7 @@
           <a:lstStyle/>
           <a:p>
             <a:r>
-              <a:t>[30 secondi · minuto 6:35] Lezione 5: COLREG e prevenzione degli abbordi, 2 domande su 20: fanali, luci speciali, i segnali diurni che abbiamo aggiunto, la gerarchia delle precedenze, il rischio di collisione e le regole di rotta. Il carteggio del punto nave e dei rilevamenti è nella lezione 4.</a:t>
+              <a:t>[30 secondi · minuto 6:35] Lezione 5: COLREG e prevenzione degli abbordi, 2 domande su 20. Che cos'è il COLREG; i fanali uno per uno, per il motore e per la vela; le navi particolari con luci e segnali diurni e i trucchetti per ricordarli; la scala delle precedenze, le regole a motore e a vela, il rischio di collisione; i segnali sonori, la nebbia e i porti; per finire 24 casi di luci da riconoscere.</a:t>
             </a:r>
           </a:p>
         </p:txBody>
@@ -880,7 +880,7 @@
           <a:lstStyle/>
           <a:p>
             <a:r>
-              <a:t>[30 secondi · minuto 7:05] Lezione 6: la sicurezza e i suoi elementi nella navigazione. I segnali sonori di manovra e in nebbia e le regole nei porti; le dotazioni di sicurezza secondo il DM 133/2024, i mezzi di soccorso e l'incendio; poi le emergenze: falla, incaglio, collisione, uomo a mare, abbandono, la radio VHF e il soccorso, il cattivo tempo, il CIRM, alcol e sostanze. Fari e segnalamento sono passati nella lezione 3.</a:t>
+              <a:t>[30 secondi · minuto 7:05] Lezione 6: la sicurezza e i suoi elementi nella navigazione. Le dotazioni di sicurezza secondo il DM 133/2024, i mezzi di soccorso e l'incendio; poi le emergenze: falla, incaglio, collisione, uomo a mare, abbandono, la radio VHF e il soccorso, il cattivo tempo, il CIRM, alcol e sostanze. Segnali sonori e porti sono passati nella lezione 5; la lezione sarà rivista sul programma della scuola.</a:t>
             </a:r>
           </a:p>
         </p:txBody>

--- a/corso/export/pptx/Patente nautica Vela-Motore entro le 12 miglia e senza limiti dalla costa - Fabrizio Fiorucci.pptx
+++ b/corso/export/pptx/Patente nautica Vela-Motore entro le 12 miglia e senza limiti dalla costa - Fabrizio Fiorucci.pptx
@@ -880,7 +880,7 @@
           <a:lstStyle/>
           <a:p>
             <a:r>
-              <a:t>[30 secondi · minuto 7:05] Lezione 6: la sicurezza e i suoi elementi nella navigazione. Le dotazioni di sicurezza secondo il DM 133/2024, i mezzi di soccorso e l'incendio; poi le emergenze: falla, incaglio, collisione, uomo a mare, abbandono, la radio VHF e il soccorso, il cattivo tempo, il CIRM, alcol e sostanze. Segnali sonori e porti sono passati nella lezione 5; la lezione sarà rivista sul programma della scuola.</a:t>
+              <a:t>[30 secondi · minuto 7:05] Lezione 6: la sicurezza, sulla scaletta della scuola. Le dotazioni una per una, con quello che chiedono i quiz e quello che chiede oggi il DM 133/2024; il fuoco, gli estintori e la falla; incaglio, collisione, uomo a mare e abbandono; il VHF, le chiamate e il soccorso; il cattivo tempo, l'ancora galleggiante e l'alcol.</a:t>
             </a:r>
           </a:p>
         </p:txBody>

--- a/corso/export/pptx/Patente nautica Vela-Motore entro le 12 miglia e senza limiti dalla costa - Fabrizio Fiorucci.pptx
+++ b/corso/export/pptx/Patente nautica Vela-Motore entro le 12 miglia e senza limiti dalla costa - Fabrizio Fiorucci.pptx
@@ -1020,7 +1020,7 @@
           <a:lstStyle/>
           <a:p>
             <a:r>
-              <a:t>[30 secondi · minuto 8:00] Lezione 8, quiz ed esercizi di carteggio di navigazione entro le 12 miglia, per tutti: è l'ultima lezione della patente entro 12 miglia a motore. Tutta la lezione è dedicata alla prova di carteggio entro 12 miglia: un esercizio dell'elenco ufficiale con 5 quesiti in 20 minuti. Si riprendono gli strumenti e si affronta un quesito alla volta, coordinate, distanza, ora o velocità e carburante, con il metodo e gli errori tipici; poi quattro esercizi ufficiali risolti sulla carta 5/D e una prova simulata a cronometro. Le emergenze sono passate nella lezione 6.</a:t>
+              <a:t>[30 secondi · minuto 8:00] Lezione 8, quiz ed esercizi di carteggio di navigazione entro le 12 miglia, per tutti: è l'ultima lezione della patente entro 12 miglia a motore. Tutta la lezione è dedicata alla prova di carteggio entro 12 miglia: un esercizio dell'elenco ufficiale con 5 quesiti in 20 minuti. Si riprendono gli strumenti e si affronta un quesito alla volta, coordinate, distanza, ora o velocità e carburante, con il metodo e gli errori tipici; poi cinque esercizi ufficiali risolti sulla carta 5/D e una prova simulata a cronometro. Le emergenze sono passate nella lezione 6.</a:t>
             </a:r>
           </a:p>
         </p:txBody>

--- a/corso/export/pptx/Patente nautica Vela-Motore entro le 12 miglia e senza limiti dalla costa - Fabrizio Fiorucci.pptx
+++ b/corso/export/pptx/Patente nautica Vela-Motore entro le 12 miglia e senza limiti dalla costa - Fabrizio Fiorucci.pptx
@@ -1090,7 +1090,7 @@
           <a:lstStyle/>
           <a:p>
             <a:r>
-              <a:t>[25 secondi · minuto 8:30] Lezione 9, la vela: solo per chi prende la patente a vela, chi fa solo motore la salta. Prepara ai 5 quiz vela. Prima l'attrezzatura: albero, boma, manovre fisse e correnti, lati e angoli delle vele, come si armano, vele di prua e nodi. Poi teoria e manovre: vento apparente e reale, centro velico e centro di deriva, andature, orzare e poggiare, regolazione, virata e abbattuta, terzaroli, panna e precedenze. Chiude un ripasso in otto flash.</a:t>
+              <a:t>[25 secondi · minuto 8:30] Lezione 9, la vela: solo per chi prende la patente a vela, chi fa solo motore la salta. Prepara ai 5 quiz vela. Prima l'attrezzatura: albero, boma, manovre fisse e correnti, lati e angoli delle vele, come si armano, vele di prua e nodi. Poi teoria e manovre: vento apparente e reale, centro velico e centro di deriva, andature, orzare e poggiare, regolazione, virata e abbattuta, terzaroli, panna e precedenze. Chiude un ripasso in otto flash; negli ultimi 45 minuti, 36 quiz vela con le risposte.</a:t>
             </a:r>
           </a:p>
         </p:txBody>

--- a/corso/export/pptx/Patente nautica Vela-Motore entro le 12 miglia e senza limiti dalla costa - Fabrizio Fiorucci.pptx
+++ b/corso/export/pptx/Patente nautica Vela-Motore entro le 12 miglia e senza limiti dalla costa - Fabrizio Fiorucci.pptx
@@ -1930,7 +1930,7 @@
           <a:lstStyle/>
           <a:p>
             <a:r>
-              <a:t>[35 secondi · minuto 14:50] Due materiali in più. A sinistra la presentazione del corso alla scuola: sette slide sulla struttura, sui percorsi entro 12 miglia e senza limiti, sulla differenza tra vela e motore e solo motore, sulle competenze e sui punti di forza. A destra le schede riassuntive per gli allievi, da stampare: una o due pagine per lezione con le regole da memorizzare, i numeri che tornano nei quiz e le formule del carteggio. I collegamenti sono nelle schede.</a:t>
+              <a:t>[35 secondi · minuto 14:50] Due materiali in più. A sinistra la presentazione del corso alla scuola: sette slide sulla struttura, sui percorsi entro 12 miglia e senza limiti, sulla differenza tra vela e motore e solo motore, sulle competenze e sui punti di forza. A destra le schede riassuntive per gli allievi, da stampare: una o due pagine per lezione con le regole da memorizzare, i numeri che tornano nei quiz e le formule del carteggio. Si trovano tra i materiali del corso, in PDF e in PowerPoint.</a:t>
             </a:r>
           </a:p>
         </p:txBody>
